--- a/entregas/posts/site/kit/editavel/efeito-rebote-sex-06-11.pptx
+++ b/entregas/posts/site/kit/editavel/efeito-rebote-sex-06-11.pptx
@@ -3743,7 +3743,7 @@
         </p:nvSpPr>
         <p:spPr>
           <a:xfrm>
-            <a:off x="915442" y="789152"/>
+            <a:off x="915442" y="866305"/>
             <a:ext cx="8076168" cy="894969"/>
           </a:xfrm>
           <a:prstGeom prst="rect">
@@ -3790,7 +3790,7 @@
         </p:nvSpPr>
         <p:spPr>
           <a:xfrm>
-            <a:off x="1326803" y="9758265"/>
+            <a:off x="1326803" y="9590793"/>
             <a:ext cx="7322374" cy="746013"/>
           </a:xfrm>
           <a:prstGeom prst="rect">
@@ -3837,7 +3837,7 @@
         </p:nvSpPr>
         <p:spPr>
           <a:xfrm>
-            <a:off x="1326803" y="10541487"/>
+            <a:off x="1326803" y="10604443"/>
             <a:ext cx="7696946" cy="965332"/>
           </a:xfrm>
           <a:prstGeom prst="rect">
@@ -4209,7 +4209,7 @@
         </p:nvSpPr>
         <p:spPr>
           <a:xfrm>
-            <a:off x="915442" y="1079840"/>
+            <a:off x="915442" y="1018941"/>
             <a:ext cx="1914346" cy="304495"/>
           </a:xfrm>
           <a:prstGeom prst="rect">
@@ -4235,13 +4235,13 @@
               </a:spcAft>
             </a:pPr>
             <a:r>
-              <a:rPr b="0" i="0" sz="2397" lang="pt-BR">
+              <a:rPr b="1" i="0" sz="2397" lang="pt-BR">
                 <a:solidFill>
                   <a:srgbClr val="B5121B"/>
                 </a:solidFill>
-                <a:latin typeface="Barlow SemiBold"/>
-                <a:ea typeface="Barlow SemiBold"/>
-                <a:cs typeface="Barlow SemiBold"/>
+                <a:latin typeface="Barlow"/>
+                <a:ea typeface="Barlow"/>
+                <a:cs typeface="Barlow"/>
               </a:rPr>
               <a:t>Em números</a:t>
             </a:r>
@@ -4256,7 +4256,7 @@
         </p:nvSpPr>
         <p:spPr>
           <a:xfrm>
-            <a:off x="915442" y="3792707"/>
+            <a:off x="915442" y="3583140"/>
             <a:ext cx="7635716" cy="933524"/>
           </a:xfrm>
           <a:prstGeom prst="rect">
@@ -4303,7 +4303,7 @@
         </p:nvSpPr>
         <p:spPr>
           <a:xfrm>
-            <a:off x="1488378" y="5173587"/>
+            <a:off x="1488378" y="5402987"/>
             <a:ext cx="195218" cy="686143"/>
           </a:xfrm>
           <a:prstGeom prst="rect">
@@ -4350,7 +4350,7 @@
         </p:nvSpPr>
         <p:spPr>
           <a:xfrm>
-            <a:off x="2175867" y="5348416"/>
+            <a:off x="2175867" y="5388432"/>
             <a:ext cx="4922535" cy="520214"/>
           </a:xfrm>
           <a:prstGeom prst="rect">
@@ -4397,7 +4397,7 @@
         </p:nvSpPr>
         <p:spPr>
           <a:xfrm>
-            <a:off x="1456283" y="6638353"/>
+            <a:off x="1456283" y="6867754"/>
             <a:ext cx="259556" cy="686143"/>
           </a:xfrm>
           <a:prstGeom prst="rect">
@@ -4444,7 +4444,7 @@
         </p:nvSpPr>
         <p:spPr>
           <a:xfrm>
-            <a:off x="2175867" y="6813182"/>
+            <a:off x="2175867" y="6853199"/>
             <a:ext cx="7285211" cy="520214"/>
           </a:xfrm>
           <a:prstGeom prst="rect">
@@ -4491,7 +4491,7 @@
         </p:nvSpPr>
         <p:spPr>
           <a:xfrm>
-            <a:off x="1456618" y="8103120"/>
+            <a:off x="1456618" y="8332520"/>
             <a:ext cx="258738" cy="686143"/>
           </a:xfrm>
           <a:prstGeom prst="rect">
@@ -4538,7 +4538,7 @@
         </p:nvSpPr>
         <p:spPr>
           <a:xfrm>
-            <a:off x="2175867" y="8277949"/>
+            <a:off x="2175867" y="8317965"/>
             <a:ext cx="7387858" cy="520214"/>
           </a:xfrm>
           <a:prstGeom prst="rect">
@@ -4585,7 +4585,7 @@
         </p:nvSpPr>
         <p:spPr>
           <a:xfrm>
-            <a:off x="915442" y="11515488"/>
+            <a:off x="915442" y="11496457"/>
             <a:ext cx="1849517" cy="437712"/>
           </a:xfrm>
           <a:prstGeom prst="rect">
@@ -4713,7 +4713,7 @@
         </p:nvSpPr>
         <p:spPr>
           <a:xfrm>
-            <a:off x="4436313" y="4964105"/>
+            <a:off x="4436313" y="4903206"/>
             <a:ext cx="1414373" cy="304495"/>
           </a:xfrm>
           <a:prstGeom prst="rect">
@@ -4739,13 +4739,13 @@
               </a:spcAft>
             </a:pPr>
             <a:r>
-              <a:rPr b="0" i="0" sz="2397" lang="pt-BR">
+              <a:rPr b="1" i="0" sz="2397" lang="pt-BR">
                 <a:solidFill>
                   <a:srgbClr val="E9C46A"/>
                 </a:solidFill>
-                <a:latin typeface="Barlow SemiBold"/>
-                <a:ea typeface="Barlow SemiBold"/>
-                <a:cs typeface="Barlow SemiBold"/>
+                <a:latin typeface="Barlow"/>
+                <a:ea typeface="Barlow"/>
+                <a:cs typeface="Barlow"/>
               </a:rPr>
               <a:t>Obrigado</a:t>
             </a:r>
@@ -4760,7 +4760,7 @@
         </p:nvSpPr>
         <p:spPr>
           <a:xfrm>
-            <a:off x="944694" y="5732831"/>
+            <a:off x="944694" y="5523264"/>
             <a:ext cx="8397463" cy="2800573"/>
           </a:xfrm>
           <a:prstGeom prst="rect">
@@ -4831,7 +4831,7 @@
         </p:nvSpPr>
         <p:spPr>
           <a:xfrm>
-            <a:off x="2531872" y="9137585"/>
+            <a:off x="2531872" y="9038830"/>
             <a:ext cx="5223108" cy="493776"/>
           </a:xfrm>
           <a:prstGeom prst="rect">
